--- a/atelier/atelier-s05-studio-numbers.pptx
+++ b/atelier/atelier-s05-studio-numbers.pptx
@@ -3316,7 +3316,7 @@
         </p:nvSpPr>
         <p:spPr>
           <a:xfrm>
-            <a:off x="762000" y="5492353"/>
+            <a:off x="762000" y="5288756"/>
             <a:ext cx="8763000" cy="1381125"/>
           </a:xfrm>
           <a:prstGeom prst="rect">
@@ -3360,7 +3360,7 @@
         </p:nvSpPr>
         <p:spPr>
           <a:xfrm>
-            <a:off x="762000" y="5492353"/>
+            <a:off x="762000" y="5288756"/>
             <a:ext cx="8763000" cy="9525"/>
           </a:xfrm>
           <a:prstGeom prst="rect">
@@ -3404,7 +3404,7 @@
         </p:nvSpPr>
         <p:spPr>
           <a:xfrm>
-            <a:off x="762000" y="6863953"/>
+            <a:off x="762000" y="6660356"/>
             <a:ext cx="8763000" cy="9525"/>
           </a:xfrm>
           <a:prstGeom prst="rect">
@@ -3448,7 +3448,7 @@
         </p:nvSpPr>
         <p:spPr>
           <a:xfrm>
-            <a:off x="762000" y="5492353"/>
+            <a:off x="762000" y="5288756"/>
             <a:ext cx="9525" cy="1381125"/>
           </a:xfrm>
           <a:prstGeom prst="rect">
@@ -3492,7 +3492,7 @@
         </p:nvSpPr>
         <p:spPr>
           <a:xfrm>
-            <a:off x="9515475" y="5492353"/>
+            <a:off x="9515475" y="5288756"/>
             <a:ext cx="9525" cy="1381125"/>
           </a:xfrm>
           <a:prstGeom prst="rect">
@@ -3536,7 +3536,7 @@
         </p:nvSpPr>
         <p:spPr>
           <a:xfrm>
-            <a:off x="762000" y="7044928"/>
+            <a:off x="762000" y="6841331"/>
             <a:ext cx="8763000" cy="1381125"/>
           </a:xfrm>
           <a:prstGeom prst="rect">
@@ -3580,7 +3580,7 @@
         </p:nvSpPr>
         <p:spPr>
           <a:xfrm>
-            <a:off x="762000" y="7044928"/>
+            <a:off x="762000" y="6841331"/>
             <a:ext cx="8763000" cy="9525"/>
           </a:xfrm>
           <a:prstGeom prst="rect">
@@ -3624,7 +3624,7 @@
         </p:nvSpPr>
         <p:spPr>
           <a:xfrm>
-            <a:off x="762000" y="8416528"/>
+            <a:off x="762000" y="8212931"/>
             <a:ext cx="8763000" cy="9525"/>
           </a:xfrm>
           <a:prstGeom prst="rect">
@@ -3668,7 +3668,7 @@
         </p:nvSpPr>
         <p:spPr>
           <a:xfrm>
-            <a:off x="762000" y="7044928"/>
+            <a:off x="762000" y="6841331"/>
             <a:ext cx="9525" cy="1381125"/>
           </a:xfrm>
           <a:prstGeom prst="rect">
@@ -3712,7 +3712,7 @@
         </p:nvSpPr>
         <p:spPr>
           <a:xfrm>
-            <a:off x="9515475" y="7044928"/>
+            <a:off x="9515475" y="6841331"/>
             <a:ext cx="9525" cy="1381125"/>
           </a:xfrm>
           <a:prstGeom prst="rect">
@@ -3756,7 +3756,7 @@
         </p:nvSpPr>
         <p:spPr>
           <a:xfrm>
-            <a:off x="762000" y="8597503"/>
+            <a:off x="762000" y="8393906"/>
             <a:ext cx="8763000" cy="1381125"/>
           </a:xfrm>
           <a:prstGeom prst="rect">
@@ -3800,7 +3800,7 @@
         </p:nvSpPr>
         <p:spPr>
           <a:xfrm>
-            <a:off x="762000" y="8597503"/>
+            <a:off x="762000" y="8393906"/>
             <a:ext cx="8763000" cy="9525"/>
           </a:xfrm>
           <a:prstGeom prst="rect">
@@ -3844,7 +3844,7 @@
         </p:nvSpPr>
         <p:spPr>
           <a:xfrm>
-            <a:off x="762000" y="9969103"/>
+            <a:off x="762000" y="9765506"/>
             <a:ext cx="8763000" cy="9525"/>
           </a:xfrm>
           <a:prstGeom prst="rect">
@@ -3888,7 +3888,7 @@
         </p:nvSpPr>
         <p:spPr>
           <a:xfrm>
-            <a:off x="762000" y="8597503"/>
+            <a:off x="762000" y="8393906"/>
             <a:ext cx="9525" cy="1381125"/>
           </a:xfrm>
           <a:prstGeom prst="rect">
@@ -3932,7 +3932,7 @@
         </p:nvSpPr>
         <p:spPr>
           <a:xfrm>
-            <a:off x="9515475" y="8597503"/>
+            <a:off x="9515475" y="8393906"/>
             <a:ext cx="9525" cy="1381125"/>
           </a:xfrm>
           <a:prstGeom prst="rect">
@@ -4305,7 +4305,7 @@
         </p:nvSpPr>
         <p:spPr>
           <a:xfrm>
-            <a:off x="762000" y="3162300"/>
+            <a:off x="762000" y="3057525"/>
             <a:ext cx="6613208" cy="971550"/>
           </a:xfrm>
           <a:prstGeom prst="rect">
@@ -4317,7 +4317,11 @@
           <a:bodyPr wrap="none" anchor="t" lIns="0" rIns="0" tIns="0" bIns="0"/>
           <a:lstStyle/>
           <a:p>
-            <a:pPr algn="l"/>
+            <a:pPr algn="l">
+              <a:lnSpc>
+                <a:spcPct val="92000"/>
+              </a:lnSpc>
+            </a:pPr>
             <a:r>
               <a:rPr sz="6900" i="1" b="0">
                 <a:solidFill>
@@ -4340,7 +4344,7 @@
         </p:nvSpPr>
         <p:spPr>
           <a:xfrm>
-            <a:off x="762000" y="4067175"/>
+            <a:off x="762000" y="3863578"/>
             <a:ext cx="12733734" cy="971550"/>
           </a:xfrm>
           <a:prstGeom prst="rect">
@@ -4379,8 +4383,8 @@
         </p:nvSpPr>
         <p:spPr>
           <a:xfrm>
-            <a:off x="1057275" y="6016228"/>
-            <a:ext cx="731520" cy="333375"/>
+            <a:off x="1057275" y="5847904"/>
+            <a:ext cx="731520" cy="262830"/>
           </a:xfrm>
           <a:prstGeom prst="rect">
             <a:avLst/>
@@ -4391,7 +4395,11 @@
           <a:bodyPr wrap="none" anchor="t" lIns="0" rIns="0" tIns="0" bIns="0"/>
           <a:lstStyle/>
           <a:p>
-            <a:pPr algn="l"/>
+            <a:pPr algn="l">
+              <a:lnSpc>
+                <a:spcPct val="92000"/>
+              </a:lnSpc>
+            </a:pPr>
             <a:r>
               <a:rPr sz="2250" i="1" b="0">
                 <a:solidFill>
@@ -4414,7 +4422,7 @@
         </p:nvSpPr>
         <p:spPr>
           <a:xfrm>
-            <a:off x="1504950" y="5787628"/>
+            <a:off x="1504950" y="5584031"/>
             <a:ext cx="11994594" cy="104775"/>
           </a:xfrm>
           <a:prstGeom prst="rect">
@@ -4449,7 +4457,7 @@
         </p:nvSpPr>
         <p:spPr>
           <a:xfrm>
-            <a:off x="1504950" y="5968603"/>
+            <a:off x="1504950" y="5765006"/>
             <a:ext cx="11994594" cy="609600"/>
           </a:xfrm>
           <a:prstGeom prst="rect">
@@ -4488,7 +4496,7 @@
         </p:nvSpPr>
         <p:spPr>
           <a:xfrm>
-            <a:off x="8992046" y="6111478"/>
+            <a:off x="8992046" y="5907881"/>
             <a:ext cx="761286" cy="142875"/>
           </a:xfrm>
           <a:prstGeom prst="rect">
@@ -4523,8 +4531,8 @@
         </p:nvSpPr>
         <p:spPr>
           <a:xfrm>
-            <a:off x="1057275" y="7568803"/>
-            <a:ext cx="731520" cy="333375"/>
+            <a:off x="1057275" y="7400479"/>
+            <a:ext cx="731520" cy="262830"/>
           </a:xfrm>
           <a:prstGeom prst="rect">
             <a:avLst/>
@@ -4535,7 +4543,11 @@
           <a:bodyPr wrap="none" anchor="t" lIns="0" rIns="0" tIns="0" bIns="0"/>
           <a:lstStyle/>
           <a:p>
-            <a:pPr algn="l"/>
+            <a:pPr algn="l">
+              <a:lnSpc>
+                <a:spcPct val="92000"/>
+              </a:lnSpc>
+            </a:pPr>
             <a:r>
               <a:rPr sz="2250" i="1" b="0">
                 <a:solidFill>
@@ -4558,7 +4570,7 @@
         </p:nvSpPr>
         <p:spPr>
           <a:xfrm>
-            <a:off x="1504950" y="7340203"/>
+            <a:off x="1504950" y="7136606"/>
             <a:ext cx="11340227" cy="104775"/>
           </a:xfrm>
           <a:prstGeom prst="rect">
@@ -4593,7 +4605,7 @@
         </p:nvSpPr>
         <p:spPr>
           <a:xfrm>
-            <a:off x="1504950" y="7521178"/>
+            <a:off x="1504950" y="7317581"/>
             <a:ext cx="11340227" cy="609600"/>
           </a:xfrm>
           <a:prstGeom prst="rect">
@@ -4632,7 +4644,7 @@
         </p:nvSpPr>
         <p:spPr>
           <a:xfrm>
-            <a:off x="8583067" y="7664053"/>
+            <a:off x="8583067" y="7460456"/>
             <a:ext cx="1415653" cy="142875"/>
           </a:xfrm>
           <a:prstGeom prst="rect">
@@ -4667,8 +4679,8 @@
         </p:nvSpPr>
         <p:spPr>
           <a:xfrm>
-            <a:off x="1057275" y="9121378"/>
-            <a:ext cx="731520" cy="333375"/>
+            <a:off x="1057275" y="8953054"/>
+            <a:ext cx="731520" cy="262830"/>
           </a:xfrm>
           <a:prstGeom prst="rect">
             <a:avLst/>
@@ -4679,7 +4691,11 @@
           <a:bodyPr wrap="none" anchor="t" lIns="0" rIns="0" tIns="0" bIns="0"/>
           <a:lstStyle/>
           <a:p>
-            <a:pPr algn="l"/>
+            <a:pPr algn="l">
+              <a:lnSpc>
+                <a:spcPct val="92000"/>
+              </a:lnSpc>
+            </a:pPr>
             <a:r>
               <a:rPr sz="2250" i="1" b="0">
                 <a:solidFill>
@@ -4702,7 +4718,7 @@
         </p:nvSpPr>
         <p:spPr>
           <a:xfrm>
-            <a:off x="1504950" y="8892778"/>
+            <a:off x="1504950" y="8689181"/>
             <a:ext cx="11372374" cy="104775"/>
           </a:xfrm>
           <a:prstGeom prst="rect">
@@ -4737,7 +4753,7 @@
         </p:nvSpPr>
         <p:spPr>
           <a:xfrm>
-            <a:off x="1504950" y="9073753"/>
+            <a:off x="1504950" y="8870156"/>
             <a:ext cx="11372374" cy="609600"/>
           </a:xfrm>
           <a:prstGeom prst="rect">
@@ -4776,7 +4792,7 @@
         </p:nvSpPr>
         <p:spPr>
           <a:xfrm>
-            <a:off x="8603159" y="9216628"/>
+            <a:off x="8603159" y="9013031"/>
             <a:ext cx="1383506" cy="142875"/>
           </a:xfrm>
           <a:prstGeom prst="rect">

--- a/atelier/atelier-s05-studio-numbers.pptx
+++ b/atelier/atelier-s05-studio-numbers.pptx
@@ -3141,7 +3141,7 @@
         <p:spPr>
           <a:xfrm>
             <a:off x="762000" y="762000"/>
-            <a:ext cx="457200" cy="9525"/>
+            <a:ext cx="552450" cy="9525"/>
           </a:xfrm>
           <a:prstGeom prst="rect">
             <a:avLst/>
@@ -3184,8 +3184,8 @@
         </p:nvSpPr>
         <p:spPr>
           <a:xfrm>
-            <a:off x="762000" y="1209675"/>
-            <a:ext cx="457200" cy="9525"/>
+            <a:off x="762000" y="1304925"/>
+            <a:ext cx="552450" cy="9525"/>
           </a:xfrm>
           <a:prstGeom prst="rect">
             <a:avLst/>
@@ -3229,7 +3229,7 @@
         <p:spPr>
           <a:xfrm>
             <a:off x="762000" y="762000"/>
-            <a:ext cx="9525" cy="457200"/>
+            <a:ext cx="9525" cy="552450"/>
           </a:xfrm>
           <a:prstGeom prst="rect">
             <a:avLst/>
@@ -3272,8 +3272,8 @@
         </p:nvSpPr>
         <p:spPr>
           <a:xfrm>
-            <a:off x="1209675" y="762000"/>
-            <a:ext cx="9525" cy="457200"/>
+            <a:off x="1304925" y="762000"/>
+            <a:ext cx="9525" cy="552450"/>
           </a:xfrm>
           <a:prstGeom prst="rect">
             <a:avLst/>
@@ -3316,8 +3316,8 @@
         </p:nvSpPr>
         <p:spPr>
           <a:xfrm>
-            <a:off x="762000" y="5288756"/>
-            <a:ext cx="8763000" cy="1381125"/>
+            <a:off x="762000" y="5765899"/>
+            <a:ext cx="8763000" cy="1847850"/>
           </a:xfrm>
           <a:prstGeom prst="rect">
             <a:avLst/>
@@ -3360,7 +3360,7 @@
         </p:nvSpPr>
         <p:spPr>
           <a:xfrm>
-            <a:off x="762000" y="5288756"/>
+            <a:off x="762000" y="5765899"/>
             <a:ext cx="8763000" cy="9525"/>
           </a:xfrm>
           <a:prstGeom prst="rect">
@@ -3404,7 +3404,7 @@
         </p:nvSpPr>
         <p:spPr>
           <a:xfrm>
-            <a:off x="762000" y="6660356"/>
+            <a:off x="762000" y="7604224"/>
             <a:ext cx="8763000" cy="9525"/>
           </a:xfrm>
           <a:prstGeom prst="rect">
@@ -3448,8 +3448,8 @@
         </p:nvSpPr>
         <p:spPr>
           <a:xfrm>
-            <a:off x="762000" y="5288756"/>
-            <a:ext cx="9525" cy="1381125"/>
+            <a:off x="762000" y="5765899"/>
+            <a:ext cx="9525" cy="1847850"/>
           </a:xfrm>
           <a:prstGeom prst="rect">
             <a:avLst/>
@@ -3492,8 +3492,8 @@
         </p:nvSpPr>
         <p:spPr>
           <a:xfrm>
-            <a:off x="9515475" y="5288756"/>
-            <a:ext cx="9525" cy="1381125"/>
+            <a:off x="9515475" y="5765899"/>
+            <a:ext cx="9525" cy="1847850"/>
           </a:xfrm>
           <a:prstGeom prst="rect">
             <a:avLst/>
@@ -3536,8 +3536,8 @@
         </p:nvSpPr>
         <p:spPr>
           <a:xfrm>
-            <a:off x="762000" y="6841331"/>
-            <a:ext cx="8763000" cy="1381125"/>
+            <a:off x="762000" y="7842349"/>
+            <a:ext cx="8763000" cy="1847850"/>
           </a:xfrm>
           <a:prstGeom prst="rect">
             <a:avLst/>
@@ -3580,7 +3580,7 @@
         </p:nvSpPr>
         <p:spPr>
           <a:xfrm>
-            <a:off x="762000" y="6841331"/>
+            <a:off x="762000" y="7842349"/>
             <a:ext cx="8763000" cy="9525"/>
           </a:xfrm>
           <a:prstGeom prst="rect">
@@ -3624,7 +3624,7 @@
         </p:nvSpPr>
         <p:spPr>
           <a:xfrm>
-            <a:off x="762000" y="8212931"/>
+            <a:off x="762000" y="9680674"/>
             <a:ext cx="8763000" cy="9525"/>
           </a:xfrm>
           <a:prstGeom prst="rect">
@@ -3668,8 +3668,8 @@
         </p:nvSpPr>
         <p:spPr>
           <a:xfrm>
-            <a:off x="762000" y="6841331"/>
-            <a:ext cx="9525" cy="1381125"/>
+            <a:off x="762000" y="7842349"/>
+            <a:ext cx="9525" cy="1847850"/>
           </a:xfrm>
           <a:prstGeom prst="rect">
             <a:avLst/>
@@ -3712,8 +3712,8 @@
         </p:nvSpPr>
         <p:spPr>
           <a:xfrm>
-            <a:off x="9515475" y="6841331"/>
-            <a:ext cx="9525" cy="1381125"/>
+            <a:off x="9515475" y="7842349"/>
+            <a:ext cx="9525" cy="1847850"/>
           </a:xfrm>
           <a:prstGeom prst="rect">
             <a:avLst/>
@@ -3756,8 +3756,8 @@
         </p:nvSpPr>
         <p:spPr>
           <a:xfrm>
-            <a:off x="762000" y="8393906"/>
-            <a:ext cx="8763000" cy="1381125"/>
+            <a:off x="762000" y="9918799"/>
+            <a:ext cx="8763000" cy="1847850"/>
           </a:xfrm>
           <a:prstGeom prst="rect">
             <a:avLst/>
@@ -3800,7 +3800,7 @@
         </p:nvSpPr>
         <p:spPr>
           <a:xfrm>
-            <a:off x="762000" y="8393906"/>
+            <a:off x="762000" y="9918799"/>
             <a:ext cx="8763000" cy="9525"/>
           </a:xfrm>
           <a:prstGeom prst="rect">
@@ -3844,7 +3844,7 @@
         </p:nvSpPr>
         <p:spPr>
           <a:xfrm>
-            <a:off x="762000" y="9765506"/>
+            <a:off x="762000" y="11757124"/>
             <a:ext cx="8763000" cy="9525"/>
           </a:xfrm>
           <a:prstGeom prst="rect">
@@ -3888,8 +3888,8 @@
         </p:nvSpPr>
         <p:spPr>
           <a:xfrm>
-            <a:off x="762000" y="8393906"/>
-            <a:ext cx="9525" cy="1381125"/>
+            <a:off x="762000" y="9918799"/>
+            <a:ext cx="9525" cy="1847850"/>
           </a:xfrm>
           <a:prstGeom prst="rect">
             <a:avLst/>
@@ -3932,8 +3932,8 @@
         </p:nvSpPr>
         <p:spPr>
           <a:xfrm>
-            <a:off x="9515475" y="8393906"/>
-            <a:ext cx="9525" cy="1381125"/>
+            <a:off x="9515475" y="9918799"/>
+            <a:ext cx="9525" cy="1847850"/>
           </a:xfrm>
           <a:prstGeom prst="rect">
             <a:avLst/>
@@ -3976,7 +3976,7 @@
         </p:nvSpPr>
         <p:spPr>
           <a:xfrm>
-            <a:off x="762000" y="15735300"/>
+            <a:off x="762000" y="15782925"/>
             <a:ext cx="8763000" cy="9525"/>
           </a:xfrm>
           <a:prstGeom prst="rect">
@@ -4020,7 +4020,7 @@
         </p:nvSpPr>
         <p:spPr>
           <a:xfrm>
-            <a:off x="762000" y="16373475"/>
+            <a:off x="762000" y="16659225"/>
             <a:ext cx="8763000" cy="9525"/>
           </a:xfrm>
           <a:prstGeom prst="rect">
@@ -4064,8 +4064,8 @@
         </p:nvSpPr>
         <p:spPr>
           <a:xfrm>
-            <a:off x="762000" y="15735300"/>
-            <a:ext cx="9525" cy="647700"/>
+            <a:off x="762000" y="15782925"/>
+            <a:ext cx="9525" cy="885825"/>
           </a:xfrm>
           <a:prstGeom prst="rect">
             <a:avLst/>
@@ -4108,8 +4108,8 @@
         </p:nvSpPr>
         <p:spPr>
           <a:xfrm>
-            <a:off x="9515475" y="15735300"/>
-            <a:ext cx="9525" cy="647700"/>
+            <a:off x="9515475" y="15782925"/>
+            <a:ext cx="9525" cy="885825"/>
           </a:xfrm>
           <a:prstGeom prst="rect">
             <a:avLst/>
@@ -4152,8 +4152,8 @@
         </p:nvSpPr>
         <p:spPr>
           <a:xfrm>
-            <a:off x="1024416" y="16012004"/>
-            <a:ext cx="94293" cy="94292"/>
+            <a:off x="1077621" y="16165220"/>
+            <a:ext cx="121233" cy="121234"/>
           </a:xfrm>
           <a:prstGeom prst="rect">
             <a:avLst/>
@@ -4196,8 +4196,8 @@
         </p:nvSpPr>
         <p:spPr>
           <a:xfrm>
-            <a:off x="862608" y="909638"/>
-            <a:ext cx="790575" cy="161925"/>
+            <a:off x="880170" y="938212"/>
+            <a:ext cx="886778" cy="200025"/>
           </a:xfrm>
           <a:prstGeom prst="rect">
             <a:avLst/>
@@ -4214,7 +4214,7 @@
               </a:lnSpc>
             </a:pPr>
             <a:r>
-              <a:rPr sz="1275" i="0" b="1" spc="51">
+              <a:rPr sz="1575" i="0" b="1" spc="63">
                 <a:solidFill>
                   <a:srgbClr val="1A1714"/>
                 </a:solidFill>
@@ -4235,8 +4235,8 @@
         </p:nvSpPr>
         <p:spPr>
           <a:xfrm>
-            <a:off x="8040588" y="938212"/>
-            <a:ext cx="2756059" cy="104775"/>
+            <a:off x="7238554" y="952500"/>
+            <a:ext cx="4039314" cy="171450"/>
           </a:xfrm>
           <a:prstGeom prst="rect">
             <a:avLst/>
@@ -4249,7 +4249,7 @@
           <a:p>
             <a:pPr algn="l"/>
             <a:r>
-              <a:rPr sz="750" i="0" b="0" spc="105">
+              <a:rPr sz="1125" i="0" b="0" spc="180">
                 <a:solidFill>
                   <a:srgbClr val="8A7E6F"/>
                 </a:solidFill>
@@ -4271,7 +4271,7 @@
         <p:spPr>
           <a:xfrm>
             <a:off x="762000" y="2857500"/>
-            <a:ext cx="14401800" cy="133350"/>
+            <a:ext cx="14401800" cy="228600"/>
           </a:xfrm>
           <a:prstGeom prst="rect">
             <a:avLst/>
@@ -4284,7 +4284,7 @@
           <a:p>
             <a:pPr algn="l"/>
             <a:r>
-              <a:rPr sz="900" i="0" b="1" spc="306">
+              <a:rPr sz="1575" i="0" b="1" spc="472">
                 <a:solidFill>
                   <a:srgbClr val="BC5B36"/>
                 </a:solidFill>
@@ -4305,8 +4305,8 @@
         </p:nvSpPr>
         <p:spPr>
           <a:xfrm>
-            <a:off x="762000" y="3057525"/>
-            <a:ext cx="6613208" cy="971550"/>
+            <a:off x="762000" y="3181350"/>
+            <a:ext cx="7425928" cy="1095375"/>
           </a:xfrm>
           <a:prstGeom prst="rect">
             <a:avLst/>
@@ -4323,7 +4323,7 @@
               </a:lnSpc>
             </a:pPr>
             <a:r>
-              <a:rPr sz="6900" i="1" b="0">
+              <a:rPr sz="7800" i="1" b="0">
                 <a:solidFill>
                   <a:srgbClr val="1A1714"/>
                 </a:solidFill>
@@ -4344,8 +4344,8 @@
         </p:nvSpPr>
         <p:spPr>
           <a:xfrm>
-            <a:off x="762000" y="3863578"/>
-            <a:ext cx="12733734" cy="971550"/>
+            <a:off x="762000" y="4083100"/>
+            <a:ext cx="14345126" cy="1104900"/>
           </a:xfrm>
           <a:prstGeom prst="rect">
             <a:avLst/>
@@ -4362,7 +4362,7 @@
               </a:lnSpc>
             </a:pPr>
             <a:r>
-              <a:rPr sz="6900" i="0" b="1" spc="-206">
+              <a:rPr sz="7800" i="0" b="1" spc="-234">
                 <a:solidFill>
                   <a:srgbClr val="1A1714"/>
                 </a:solidFill>
@@ -4383,8 +4383,8 @@
         </p:nvSpPr>
         <p:spPr>
           <a:xfrm>
-            <a:off x="1057275" y="5847904"/>
-            <a:ext cx="731520" cy="262830"/>
+            <a:off x="1152525" y="6514505"/>
+            <a:ext cx="853440" cy="350490"/>
           </a:xfrm>
           <a:prstGeom prst="rect">
             <a:avLst/>
@@ -4401,7 +4401,7 @@
               </a:lnSpc>
             </a:pPr>
             <a:r>
-              <a:rPr sz="2250" i="1" b="0">
+              <a:rPr sz="3000" i="1" b="0">
                 <a:solidFill>
                   <a:srgbClr val="BC5B36"/>
                 </a:solidFill>
@@ -4422,8 +4422,8 @@
         </p:nvSpPr>
         <p:spPr>
           <a:xfrm>
-            <a:off x="1504950" y="5584031"/>
-            <a:ext cx="11994594" cy="104775"/>
+            <a:off x="1733550" y="6156424"/>
+            <a:ext cx="11209496" cy="171450"/>
           </a:xfrm>
           <a:prstGeom prst="rect">
             <a:avLst/>
@@ -4436,13 +4436,13 @@
           <a:p>
             <a:pPr algn="l"/>
             <a:r>
-              <a:rPr sz="750" i="0" b="0" spc="75">
+              <a:rPr sz="1200" i="0" b="1" spc="216">
                 <a:solidFill>
                   <a:srgbClr val="8A7E6F"/>
                 </a:solidFill>
-                <a:latin typeface="Space Mono"/>
-                <a:ea typeface="Space Mono"/>
-                <a:cs typeface="Space Mono"/>
+                <a:latin typeface="Archivo"/>
+                <a:ea typeface="Archivo"/>
+                <a:cs typeface="Archivo"/>
               </a:rPr>
               <a:t>PROJECTS COMPLETED</a:t>
             </a:r>
@@ -4457,8 +4457,8 @@
         </p:nvSpPr>
         <p:spPr>
           <a:xfrm>
-            <a:off x="1504950" y="5765006"/>
-            <a:ext cx="11994594" cy="609600"/>
+            <a:off x="1733550" y="6423124"/>
+            <a:ext cx="11209496" cy="800100"/>
           </a:xfrm>
           <a:prstGeom prst="rect">
             <a:avLst/>
@@ -4475,7 +4475,7 @@
               </a:lnSpc>
             </a:pPr>
             <a:r>
-              <a:rPr sz="4800" i="0" b="1" spc="-144">
+              <a:rPr sz="6300" i="0" b="1" spc="-189">
                 <a:solidFill>
                   <a:srgbClr val="1A1714"/>
                 </a:solidFill>
@@ -4496,8 +4496,8 @@
         </p:nvSpPr>
         <p:spPr>
           <a:xfrm>
-            <a:off x="8992046" y="5907881"/>
-            <a:ext cx="761286" cy="142875"/>
+            <a:off x="8787110" y="6585049"/>
+            <a:ext cx="936784" cy="209550"/>
           </a:xfrm>
           <a:prstGeom prst="rect">
             <a:avLst/>
@@ -4510,7 +4510,7 @@
           <a:p>
             <a:pPr algn="l"/>
             <a:r>
-              <a:rPr sz="975" i="0" b="1">
+              <a:rPr sz="1425" i="0" b="1">
                 <a:solidFill>
                   <a:srgbClr val="BC5B36"/>
                 </a:solidFill>
@@ -4531,8 +4531,8 @@
         </p:nvSpPr>
         <p:spPr>
           <a:xfrm>
-            <a:off x="1057275" y="7400479"/>
-            <a:ext cx="731520" cy="262830"/>
+            <a:off x="1152525" y="8590955"/>
+            <a:ext cx="853440" cy="350490"/>
           </a:xfrm>
           <a:prstGeom prst="rect">
             <a:avLst/>
@@ -4549,7 +4549,7 @@
               </a:lnSpc>
             </a:pPr>
             <a:r>
-              <a:rPr sz="2250" i="1" b="0">
+              <a:rPr sz="3000" i="1" b="0">
                 <a:solidFill>
                   <a:srgbClr val="BC5B36"/>
                 </a:solidFill>
@@ -4570,8 +4570,8 @@
         </p:nvSpPr>
         <p:spPr>
           <a:xfrm>
-            <a:off x="1504950" y="7136606"/>
-            <a:ext cx="11340227" cy="104775"/>
+            <a:off x="1733550" y="8232874"/>
+            <a:ext cx="10253424" cy="171450"/>
           </a:xfrm>
           <a:prstGeom prst="rect">
             <a:avLst/>
@@ -4584,13 +4584,13 @@
           <a:p>
             <a:pPr algn="l"/>
             <a:r>
-              <a:rPr sz="750" i="0" b="0" spc="75">
+              <a:rPr sz="1200" i="0" b="1" spc="216">
                 <a:solidFill>
                   <a:srgbClr val="8A7E6F"/>
                 </a:solidFill>
-                <a:latin typeface="Space Mono"/>
-                <a:ea typeface="Space Mono"/>
-                <a:cs typeface="Space Mono"/>
+                <a:latin typeface="Archivo"/>
+                <a:ea typeface="Archivo"/>
+                <a:cs typeface="Archivo"/>
               </a:rPr>
               <a:t>ROOMS STYLED</a:t>
             </a:r>
@@ -4605,8 +4605,8 @@
         </p:nvSpPr>
         <p:spPr>
           <a:xfrm>
-            <a:off x="1504950" y="7317581"/>
-            <a:ext cx="11340227" cy="609600"/>
+            <a:off x="1733550" y="8499574"/>
+            <a:ext cx="10253424" cy="800100"/>
           </a:xfrm>
           <a:prstGeom prst="rect">
             <a:avLst/>
@@ -4623,7 +4623,7 @@
               </a:lnSpc>
             </a:pPr>
             <a:r>
-              <a:rPr sz="4800" i="0" b="1" spc="-144">
+              <a:rPr sz="6300" i="0" b="1" spc="-189">
                 <a:solidFill>
                   <a:srgbClr val="1A1714"/>
                 </a:solidFill>
@@ -4644,8 +4644,8 @@
         </p:nvSpPr>
         <p:spPr>
           <a:xfrm>
-            <a:off x="8583067" y="7460456"/>
-            <a:ext cx="1415653" cy="142875"/>
+            <a:off x="8189565" y="8661499"/>
+            <a:ext cx="1892856" cy="209550"/>
           </a:xfrm>
           <a:prstGeom prst="rect">
             <a:avLst/>
@@ -4658,7 +4658,7 @@
           <a:p>
             <a:pPr algn="l"/>
             <a:r>
-              <a:rPr sz="975" i="0" b="1">
+              <a:rPr sz="1425" i="0" b="1">
                 <a:solidFill>
                   <a:srgbClr val="BC5B36"/>
                 </a:solidFill>
@@ -4679,8 +4679,8 @@
         </p:nvSpPr>
         <p:spPr>
           <a:xfrm>
-            <a:off x="1057275" y="8953054"/>
-            <a:ext cx="731520" cy="262830"/>
+            <a:off x="1152525" y="10667405"/>
+            <a:ext cx="853440" cy="350490"/>
           </a:xfrm>
           <a:prstGeom prst="rect">
             <a:avLst/>
@@ -4697,7 +4697,7 @@
               </a:lnSpc>
             </a:pPr>
             <a:r>
-              <a:rPr sz="2250" i="1" b="0">
+              <a:rPr sz="3000" i="1" b="0">
                 <a:solidFill>
                   <a:srgbClr val="BC5B36"/>
                 </a:solidFill>
@@ -4718,8 +4718,8 @@
         </p:nvSpPr>
         <p:spPr>
           <a:xfrm>
-            <a:off x="1504950" y="8689181"/>
-            <a:ext cx="11372374" cy="104775"/>
+            <a:off x="1733550" y="10309324"/>
+            <a:ext cx="10300097" cy="171450"/>
           </a:xfrm>
           <a:prstGeom prst="rect">
             <a:avLst/>
@@ -4732,13 +4732,13 @@
           <a:p>
             <a:pPr algn="l"/>
             <a:r>
-              <a:rPr sz="750" i="0" b="0" spc="75">
+              <a:rPr sz="1200" i="0" b="1" spc="216">
                 <a:solidFill>
                   <a:srgbClr val="8A7E6F"/>
                 </a:solidFill>
-                <a:latin typeface="Space Mono"/>
-                <a:ea typeface="Space Mono"/>
-                <a:cs typeface="Space Mono"/>
+                <a:latin typeface="Archivo"/>
+                <a:ea typeface="Archivo"/>
+                <a:cs typeface="Archivo"/>
               </a:rPr>
               <a:t>YEARS IN STUDIO</a:t>
             </a:r>
@@ -4753,8 +4753,8 @@
         </p:nvSpPr>
         <p:spPr>
           <a:xfrm>
-            <a:off x="1504950" y="8870156"/>
-            <a:ext cx="11372374" cy="609600"/>
+            <a:off x="1733550" y="10576024"/>
+            <a:ext cx="10300097" cy="800100"/>
           </a:xfrm>
           <a:prstGeom prst="rect">
             <a:avLst/>
@@ -4771,7 +4771,7 @@
               </a:lnSpc>
             </a:pPr>
             <a:r>
-              <a:rPr sz="4800" i="0" b="1" spc="-144">
+              <a:rPr sz="6300" i="0" b="1" spc="-189">
                 <a:solidFill>
                   <a:srgbClr val="1A1714"/>
                 </a:solidFill>
@@ -4792,8 +4792,8 @@
         </p:nvSpPr>
         <p:spPr>
           <a:xfrm>
-            <a:off x="8603159" y="9013031"/>
-            <a:ext cx="1383506" cy="142875"/>
+            <a:off x="8218736" y="10737949"/>
+            <a:ext cx="1846183" cy="209550"/>
           </a:xfrm>
           <a:prstGeom prst="rect">
             <a:avLst/>
@@ -4806,7 +4806,7 @@
           <a:p>
             <a:pPr algn="l"/>
             <a:r>
-              <a:rPr sz="975" i="0" b="1">
+              <a:rPr sz="1425" i="0" b="1">
                 <a:solidFill>
                   <a:srgbClr val="BC5B36"/>
                 </a:solidFill>
@@ -4827,8 +4827,8 @@
         </p:nvSpPr>
         <p:spPr>
           <a:xfrm>
-            <a:off x="1238250" y="15978188"/>
-            <a:ext cx="3222546" cy="161925"/>
+            <a:off x="1333500" y="16097250"/>
+            <a:ext cx="4618672" cy="257175"/>
           </a:xfrm>
           <a:prstGeom prst="rect">
             <a:avLst/>
@@ -4841,7 +4841,7 @@
           <a:p>
             <a:pPr algn="l"/>
             <a:r>
-              <a:rPr sz="1125" i="0" b="1" spc="135">
+              <a:rPr sz="1725" i="0" b="1" spc="172">
                 <a:solidFill>
                   <a:srgbClr val="1A1714"/>
                 </a:solidFill>
@@ -4862,8 +4862,8 @@
         </p:nvSpPr>
         <p:spPr>
           <a:xfrm>
-            <a:off x="9105900" y="15954375"/>
-            <a:ext cx="609600" cy="209550"/>
+            <a:off x="8982075" y="16078200"/>
+            <a:ext cx="716280" cy="295275"/>
           </a:xfrm>
           <a:prstGeom prst="rect">
             <a:avLst/>
@@ -4876,7 +4876,7 @@
           <a:p>
             <a:pPr algn="l"/>
             <a:r>
-              <a:rPr sz="1350" i="0" b="0">
+              <a:rPr sz="1950" i="0" b="0">
                 <a:solidFill>
                   <a:srgbClr val="BC5B36"/>
                 </a:solidFill>
@@ -4897,8 +4897,8 @@
         </p:nvSpPr>
         <p:spPr>
           <a:xfrm>
-            <a:off x="2801585" y="17297400"/>
-            <a:ext cx="4683681" cy="123825"/>
+            <a:off x="1823799" y="17192625"/>
+            <a:ext cx="6639401" cy="180975"/>
           </a:xfrm>
           <a:prstGeom prst="rect">
             <a:avLst/>
@@ -4911,7 +4911,7 @@
           <a:p>
             <a:pPr algn="ctr"/>
             <a:r>
-              <a:rPr sz="825" i="0" b="0" spc="165">
+              <a:rPr sz="1200" i="0" b="0" spc="240">
                 <a:solidFill>
                   <a:srgbClr val="8A7E6F"/>
                 </a:solidFill>

--- a/atelier/atelier-s05-studio-numbers.pptx
+++ b/atelier/atelier-s05-studio-numbers.pptx
@@ -3316,8 +3316,8 @@
         </p:nvSpPr>
         <p:spPr>
           <a:xfrm>
-            <a:off x="762000" y="5765899"/>
-            <a:ext cx="8763000" cy="1847850"/>
+            <a:off x="762000" y="5784949"/>
+            <a:ext cx="8763000" cy="1885950"/>
           </a:xfrm>
           <a:prstGeom prst="rect">
             <a:avLst/>
@@ -3360,7 +3360,7 @@
         </p:nvSpPr>
         <p:spPr>
           <a:xfrm>
-            <a:off x="762000" y="5765899"/>
+            <a:off x="762000" y="5784949"/>
             <a:ext cx="8763000" cy="9525"/>
           </a:xfrm>
           <a:prstGeom prst="rect">
@@ -3404,7 +3404,7 @@
         </p:nvSpPr>
         <p:spPr>
           <a:xfrm>
-            <a:off x="762000" y="7604224"/>
+            <a:off x="762000" y="7661374"/>
             <a:ext cx="8763000" cy="9525"/>
           </a:xfrm>
           <a:prstGeom prst="rect">
@@ -3448,8 +3448,8 @@
         </p:nvSpPr>
         <p:spPr>
           <a:xfrm>
-            <a:off x="762000" y="5765899"/>
-            <a:ext cx="9525" cy="1847850"/>
+            <a:off x="762000" y="5784949"/>
+            <a:ext cx="9525" cy="1885950"/>
           </a:xfrm>
           <a:prstGeom prst="rect">
             <a:avLst/>
@@ -3492,8 +3492,8 @@
         </p:nvSpPr>
         <p:spPr>
           <a:xfrm>
-            <a:off x="9515475" y="5765899"/>
-            <a:ext cx="9525" cy="1847850"/>
+            <a:off x="9515475" y="5784949"/>
+            <a:ext cx="9525" cy="1885950"/>
           </a:xfrm>
           <a:prstGeom prst="rect">
             <a:avLst/>
@@ -3536,8 +3536,8 @@
         </p:nvSpPr>
         <p:spPr>
           <a:xfrm>
-            <a:off x="762000" y="7842349"/>
-            <a:ext cx="8763000" cy="1847850"/>
+            <a:off x="762000" y="7899499"/>
+            <a:ext cx="8763000" cy="1885950"/>
           </a:xfrm>
           <a:prstGeom prst="rect">
             <a:avLst/>
@@ -3580,7 +3580,7 @@
         </p:nvSpPr>
         <p:spPr>
           <a:xfrm>
-            <a:off x="762000" y="7842349"/>
+            <a:off x="762000" y="7899499"/>
             <a:ext cx="8763000" cy="9525"/>
           </a:xfrm>
           <a:prstGeom prst="rect">
@@ -3624,7 +3624,7 @@
         </p:nvSpPr>
         <p:spPr>
           <a:xfrm>
-            <a:off x="762000" y="9680674"/>
+            <a:off x="762000" y="9775924"/>
             <a:ext cx="8763000" cy="9525"/>
           </a:xfrm>
           <a:prstGeom prst="rect">
@@ -3668,8 +3668,8 @@
         </p:nvSpPr>
         <p:spPr>
           <a:xfrm>
-            <a:off x="762000" y="7842349"/>
-            <a:ext cx="9525" cy="1847850"/>
+            <a:off x="762000" y="7899499"/>
+            <a:ext cx="9525" cy="1885950"/>
           </a:xfrm>
           <a:prstGeom prst="rect">
             <a:avLst/>
@@ -3712,8 +3712,8 @@
         </p:nvSpPr>
         <p:spPr>
           <a:xfrm>
-            <a:off x="9515475" y="7842349"/>
-            <a:ext cx="9525" cy="1847850"/>
+            <a:off x="9515475" y="7899499"/>
+            <a:ext cx="9525" cy="1885950"/>
           </a:xfrm>
           <a:prstGeom prst="rect">
             <a:avLst/>
@@ -3756,8 +3756,8 @@
         </p:nvSpPr>
         <p:spPr>
           <a:xfrm>
-            <a:off x="762000" y="9918799"/>
-            <a:ext cx="8763000" cy="1847850"/>
+            <a:off x="762000" y="10014049"/>
+            <a:ext cx="8763000" cy="1885950"/>
           </a:xfrm>
           <a:prstGeom prst="rect">
             <a:avLst/>
@@ -3800,7 +3800,7 @@
         </p:nvSpPr>
         <p:spPr>
           <a:xfrm>
-            <a:off x="762000" y="9918799"/>
+            <a:off x="762000" y="10014049"/>
             <a:ext cx="8763000" cy="9525"/>
           </a:xfrm>
           <a:prstGeom prst="rect">
@@ -3844,7 +3844,7 @@
         </p:nvSpPr>
         <p:spPr>
           <a:xfrm>
-            <a:off x="762000" y="11757124"/>
+            <a:off x="762000" y="11890474"/>
             <a:ext cx="8763000" cy="9525"/>
           </a:xfrm>
           <a:prstGeom prst="rect">
@@ -3888,8 +3888,8 @@
         </p:nvSpPr>
         <p:spPr>
           <a:xfrm>
-            <a:off x="762000" y="9918799"/>
-            <a:ext cx="9525" cy="1847850"/>
+            <a:off x="762000" y="10014049"/>
+            <a:ext cx="9525" cy="1885950"/>
           </a:xfrm>
           <a:prstGeom prst="rect">
             <a:avLst/>
@@ -3932,8 +3932,8 @@
         </p:nvSpPr>
         <p:spPr>
           <a:xfrm>
-            <a:off x="9515475" y="9918799"/>
-            <a:ext cx="9525" cy="1847850"/>
+            <a:off x="9515475" y="10014049"/>
+            <a:ext cx="9525" cy="1885950"/>
           </a:xfrm>
           <a:prstGeom prst="rect">
             <a:avLst/>
@@ -4235,8 +4235,8 @@
         </p:nvSpPr>
         <p:spPr>
           <a:xfrm>
-            <a:off x="7238554" y="952500"/>
-            <a:ext cx="4039314" cy="171450"/>
+            <a:off x="6704856" y="933450"/>
+            <a:ext cx="4893231" cy="209550"/>
           </a:xfrm>
           <a:prstGeom prst="rect">
             <a:avLst/>
@@ -4249,7 +4249,7 @@
           <a:p>
             <a:pPr algn="l"/>
             <a:r>
-              <a:rPr sz="1125" i="0" b="0" spc="180">
+              <a:rPr sz="1425" i="0" b="0" spc="199">
                 <a:solidFill>
                   <a:srgbClr val="8A7E6F"/>
                 </a:solidFill>
@@ -4271,7 +4271,7 @@
         <p:spPr>
           <a:xfrm>
             <a:off x="762000" y="2857500"/>
-            <a:ext cx="14401800" cy="228600"/>
+            <a:ext cx="14401800" cy="247650"/>
           </a:xfrm>
           <a:prstGeom prst="rect">
             <a:avLst/>
@@ -4284,7 +4284,7 @@
           <a:p>
             <a:pPr algn="l"/>
             <a:r>
-              <a:rPr sz="1575" i="0" b="1" spc="472">
+              <a:rPr sz="1650" i="0" b="1" spc="495">
                 <a:solidFill>
                   <a:srgbClr val="BC5B36"/>
                 </a:solidFill>
@@ -4305,7 +4305,7 @@
         </p:nvSpPr>
         <p:spPr>
           <a:xfrm>
-            <a:off x="762000" y="3181350"/>
+            <a:off x="762000" y="3200400"/>
             <a:ext cx="7425928" cy="1095375"/>
           </a:xfrm>
           <a:prstGeom prst="rect">
@@ -4344,7 +4344,7 @@
         </p:nvSpPr>
         <p:spPr>
           <a:xfrm>
-            <a:off x="762000" y="4083100"/>
+            <a:off x="762000" y="4102150"/>
             <a:ext cx="14345126" cy="1104900"/>
           </a:xfrm>
           <a:prstGeom prst="rect">
@@ -4383,7 +4383,7 @@
         </p:nvSpPr>
         <p:spPr>
           <a:xfrm>
-            <a:off x="1152525" y="6514505"/>
+            <a:off x="1152525" y="6552605"/>
             <a:ext cx="853440" cy="350490"/>
           </a:xfrm>
           <a:prstGeom prst="rect">
@@ -4422,8 +4422,8 @@
         </p:nvSpPr>
         <p:spPr>
           <a:xfrm>
-            <a:off x="1733550" y="6156424"/>
-            <a:ext cx="11209496" cy="171450"/>
+            <a:off x="1733550" y="6175474"/>
+            <a:ext cx="11209496" cy="209550"/>
           </a:xfrm>
           <a:prstGeom prst="rect">
             <a:avLst/>
@@ -4436,7 +4436,7 @@
           <a:p>
             <a:pPr algn="l"/>
             <a:r>
-              <a:rPr sz="1200" i="0" b="1" spc="216">
+              <a:rPr sz="1425" i="0" b="1" spc="228">
                 <a:solidFill>
                   <a:srgbClr val="8A7E6F"/>
                 </a:solidFill>
@@ -4457,7 +4457,7 @@
         </p:nvSpPr>
         <p:spPr>
           <a:xfrm>
-            <a:off x="1733550" y="6423124"/>
+            <a:off x="1733550" y="6480274"/>
             <a:ext cx="11209496" cy="800100"/>
           </a:xfrm>
           <a:prstGeom prst="rect">
@@ -4496,7 +4496,7 @@
         </p:nvSpPr>
         <p:spPr>
           <a:xfrm>
-            <a:off x="8787110" y="6585049"/>
+            <a:off x="8787110" y="6623149"/>
             <a:ext cx="936784" cy="209550"/>
           </a:xfrm>
           <a:prstGeom prst="rect">
@@ -4531,7 +4531,7 @@
         </p:nvSpPr>
         <p:spPr>
           <a:xfrm>
-            <a:off x="1152525" y="8590955"/>
+            <a:off x="1152525" y="8667155"/>
             <a:ext cx="853440" cy="350490"/>
           </a:xfrm>
           <a:prstGeom prst="rect">
@@ -4570,8 +4570,8 @@
         </p:nvSpPr>
         <p:spPr>
           <a:xfrm>
-            <a:off x="1733550" y="8232874"/>
-            <a:ext cx="10253424" cy="171450"/>
+            <a:off x="1733550" y="8290024"/>
+            <a:ext cx="10253424" cy="209550"/>
           </a:xfrm>
           <a:prstGeom prst="rect">
             <a:avLst/>
@@ -4584,7 +4584,7 @@
           <a:p>
             <a:pPr algn="l"/>
             <a:r>
-              <a:rPr sz="1200" i="0" b="1" spc="216">
+              <a:rPr sz="1425" i="0" b="1" spc="228">
                 <a:solidFill>
                   <a:srgbClr val="8A7E6F"/>
                 </a:solidFill>
@@ -4605,7 +4605,7 @@
         </p:nvSpPr>
         <p:spPr>
           <a:xfrm>
-            <a:off x="1733550" y="8499574"/>
+            <a:off x="1733550" y="8594824"/>
             <a:ext cx="10253424" cy="800100"/>
           </a:xfrm>
           <a:prstGeom prst="rect">
@@ -4644,7 +4644,7 @@
         </p:nvSpPr>
         <p:spPr>
           <a:xfrm>
-            <a:off x="8189565" y="8661499"/>
+            <a:off x="8189565" y="8737699"/>
             <a:ext cx="1892856" cy="209550"/>
           </a:xfrm>
           <a:prstGeom prst="rect">
@@ -4679,7 +4679,7 @@
         </p:nvSpPr>
         <p:spPr>
           <a:xfrm>
-            <a:off x="1152525" y="10667405"/>
+            <a:off x="1152525" y="10781705"/>
             <a:ext cx="853440" cy="350490"/>
           </a:xfrm>
           <a:prstGeom prst="rect">
@@ -4718,8 +4718,8 @@
         </p:nvSpPr>
         <p:spPr>
           <a:xfrm>
-            <a:off x="1733550" y="10309324"/>
-            <a:ext cx="10300097" cy="171450"/>
+            <a:off x="1733550" y="10404574"/>
+            <a:ext cx="10300097" cy="209550"/>
           </a:xfrm>
           <a:prstGeom prst="rect">
             <a:avLst/>
@@ -4732,7 +4732,7 @@
           <a:p>
             <a:pPr algn="l"/>
             <a:r>
-              <a:rPr sz="1200" i="0" b="1" spc="216">
+              <a:rPr sz="1425" i="0" b="1" spc="228">
                 <a:solidFill>
                   <a:srgbClr val="8A7E6F"/>
                 </a:solidFill>
@@ -4753,7 +4753,7 @@
         </p:nvSpPr>
         <p:spPr>
           <a:xfrm>
-            <a:off x="1733550" y="10576024"/>
+            <a:off x="1733550" y="10709374"/>
             <a:ext cx="10300097" cy="800100"/>
           </a:xfrm>
           <a:prstGeom prst="rect">
@@ -4792,7 +4792,7 @@
         </p:nvSpPr>
         <p:spPr>
           <a:xfrm>
-            <a:off x="8218736" y="10737949"/>
+            <a:off x="8218736" y="10852249"/>
             <a:ext cx="1846183" cy="209550"/>
           </a:xfrm>
           <a:prstGeom prst="rect">
@@ -4827,8 +4827,8 @@
         </p:nvSpPr>
         <p:spPr>
           <a:xfrm>
-            <a:off x="1333500" y="16097250"/>
-            <a:ext cx="4618672" cy="257175"/>
+            <a:off x="1333500" y="16078200"/>
+            <a:ext cx="5215890" cy="295275"/>
           </a:xfrm>
           <a:prstGeom prst="rect">
             <a:avLst/>
@@ -4841,7 +4841,7 @@
           <a:p>
             <a:pPr algn="l"/>
             <a:r>
-              <a:rPr sz="1725" i="0" b="1" spc="172">
+              <a:rPr sz="2025" i="0" b="1" spc="162">
                 <a:solidFill>
                   <a:srgbClr val="1A1714"/>
                 </a:solidFill>
@@ -4897,8 +4897,8 @@
         </p:nvSpPr>
         <p:spPr>
           <a:xfrm>
-            <a:off x="1823799" y="17192625"/>
-            <a:ext cx="6639401" cy="180975"/>
+            <a:off x="1329690" y="17164050"/>
+            <a:ext cx="7627620" cy="209550"/>
           </a:xfrm>
           <a:prstGeom prst="rect">
             <a:avLst/>
@@ -4911,7 +4911,7 @@
           <a:p>
             <a:pPr algn="ctr"/>
             <a:r>
-              <a:rPr sz="1200" i="0" b="0" spc="240">
+              <a:rPr sz="1425" i="0" b="0" spc="256">
                 <a:solidFill>
                   <a:srgbClr val="8A7E6F"/>
                 </a:solidFill>
